--- a/docs/Kuja_Portfolio/00_Overall_Kuja/Kuja_Pitch_Deck_V10_Professional_July2026.pptx
+++ b/docs/Kuja_Portfolio/00_Overall_Kuja/Kuja_Pitch_Deck_V10_Professional_July2026.pptx
@@ -11580,7 +11580,7 @@
         <p:spPr>
           <a:xfrm>
             <a:off x="9539935" y="3017520"/>
-            <a:ext cx="3657600" cy="274320"/>
+            <a:ext cx="2011680" cy="274320"/>
           </a:xfrm>
           <a:prstGeom prst="rect">
             <a:avLst/>
@@ -11619,7 +11619,7 @@
         <p:spPr>
           <a:xfrm>
             <a:off x="9539935" y="3383280"/>
-            <a:ext cx="3200400" cy="274320"/>
+            <a:ext cx="2011680" cy="274320"/>
           </a:xfrm>
           <a:prstGeom prst="rect">
             <a:avLst/>
@@ -11658,7 +11658,7 @@
         <p:spPr>
           <a:xfrm>
             <a:off x="9539935" y="3657600"/>
-            <a:ext cx="3200400" cy="274320"/>
+            <a:ext cx="2011680" cy="274320"/>
           </a:xfrm>
           <a:prstGeom prst="rect">
             <a:avLst/>
@@ -11697,7 +11697,7 @@
         <p:spPr>
           <a:xfrm>
             <a:off x="9539935" y="4023360"/>
-            <a:ext cx="3200400" cy="274320"/>
+            <a:ext cx="2011680" cy="274320"/>
           </a:xfrm>
           <a:prstGeom prst="rect">
             <a:avLst/>
@@ -11736,7 +11736,7 @@
         <p:spPr>
           <a:xfrm>
             <a:off x="9539935" y="4297680"/>
-            <a:ext cx="3200400" cy="274320"/>
+            <a:ext cx="2011680" cy="274320"/>
           </a:xfrm>
           <a:prstGeom prst="rect">
             <a:avLst/>
@@ -11775,7 +11775,7 @@
         <p:spPr>
           <a:xfrm>
             <a:off x="9539935" y="4663440"/>
-            <a:ext cx="3200400" cy="274320"/>
+            <a:ext cx="2011680" cy="274320"/>
           </a:xfrm>
           <a:prstGeom prst="rect">
             <a:avLst/>
@@ -11814,7 +11814,7 @@
         <p:spPr>
           <a:xfrm>
             <a:off x="9539935" y="4937760"/>
-            <a:ext cx="3200400" cy="274320"/>
+            <a:ext cx="2011680" cy="274320"/>
           </a:xfrm>
           <a:prstGeom prst="rect">
             <a:avLst/>
